--- a/이수혁/12일차/middle_1st_수정본1_이수혁.pptx
+++ b/이수혁/12일차/middle_1st_수정본1_이수혁.pptx
@@ -476,6 +476,90 @@
     </a:lvl9pPr>
   </p:notesStyle>
 </p:notesMaster>
+</file>
+
+<file path=ppt/notesSlides/notesSlide1.xml><?xml version="1.0" encoding="utf-8"?>
+<p:notes xmlns:a="http://schemas.openxmlformats.org/drawingml/2006/main" xmlns:r="http://schemas.openxmlformats.org/officeDocument/2006/relationships" xmlns:p="http://schemas.openxmlformats.org/presentationml/2006/main">
+  <p:cSld>
+    <p:spTree>
+      <p:nvGrpSpPr>
+        <p:cNvPr id="1" name=""/>
+        <p:cNvGrpSpPr/>
+        <p:nvPr/>
+      </p:nvGrpSpPr>
+      <p:grpSpPr>
+        <a:xfrm>
+          <a:off x="0" y="0"/>
+          <a:ext cx="0" cy="0"/>
+          <a:chOff x="0" y="0"/>
+          <a:chExt cx="0" cy="0"/>
+        </a:xfrm>
+      </p:grpSpPr>
+      <p:sp>
+        <p:nvSpPr>
+          <p:cNvPr id="2" name="슬라이드 이미지 개체 틀 1"/>
+          <p:cNvSpPr>
+            <a:spLocks noGrp="1" noRot="1" noChangeAspect="1"/>
+          </p:cNvSpPr>
+          <p:nvPr>
+            <p:ph type="sldImg"/>
+          </p:nvPr>
+        </p:nvSpPr>
+        <p:spPr/>
+      </p:sp>
+      <p:sp>
+        <p:nvSpPr>
+          <p:cNvPr id="3" name="슬라이드 노트 개체 틀 2"/>
+          <p:cNvSpPr>
+            <a:spLocks noGrp="1"/>
+          </p:cNvSpPr>
+          <p:nvPr>
+            <p:ph type="body" idx="1"/>
+          </p:nvPr>
+        </p:nvSpPr>
+        <p:spPr/>
+        <p:txBody>
+          <a:bodyPr/>
+          <a:lstStyle/>
+          <a:p>
+            <a:endParaRPr lang="ko-KR" altLang="en-US" dirty="0"/>
+          </a:p>
+        </p:txBody>
+      </p:sp>
+      <p:sp>
+        <p:nvSpPr>
+          <p:cNvPr id="4" name="슬라이드 번호 개체 틀 3"/>
+          <p:cNvSpPr>
+            <a:spLocks noGrp="1"/>
+          </p:cNvSpPr>
+          <p:nvPr>
+            <p:ph type="sldNum" sz="quarter" idx="10"/>
+          </p:nvPr>
+        </p:nvSpPr>
+        <p:spPr/>
+        <p:txBody>
+          <a:bodyPr/>
+          <a:lstStyle/>
+          <a:p>
+            <a:fld id="{57D96989-4F0F-4B73-95DB-12DBB89806B6}" type="slidenum">
+              <a:rPr lang="ko-KR" altLang="en-US" smtClean="0"/>
+              <a:t>2</a:t>
+            </a:fld>
+            <a:endParaRPr lang="ko-KR" altLang="en-US"/>
+          </a:p>
+        </p:txBody>
+      </p:sp>
+    </p:spTree>
+    <p:extLst>
+      <p:ext uri="{BB962C8B-B14F-4D97-AF65-F5344CB8AC3E}">
+        <p14:creationId xmlns:p14="http://schemas.microsoft.com/office/powerpoint/2010/main" val="2457133990"/>
+      </p:ext>
+    </p:extLst>
+  </p:cSld>
+  <p:clrMapOvr>
+    <a:masterClrMapping/>
+  </p:clrMapOvr>
+</p:notes>
 </file>
 
 <file path=ppt/slideLayouts/slideLayout1.xml><?xml version="1.0" encoding="utf-8"?>
@@ -3524,7 +3608,7 @@
           <p:nvPr/>
         </p:nvPicPr>
         <p:blipFill>
-          <a:blip r:embed="rId2"/>
+          <a:blip r:embed="rId3"/>
           <a:stretch>
             <a:fillRect/>
           </a:stretch>
@@ -3532,7 +3616,7 @@
         <p:spPr>
           <a:xfrm>
             <a:off x="0" y="38100"/>
-            <a:ext cx="16256000" cy="9067800"/>
+            <a:ext cx="16256000" cy="9105900"/>
           </a:xfrm>
           <a:prstGeom prst="rect">
             <a:avLst/>
@@ -3599,7 +3683,7 @@
           <p:nvPr/>
         </p:nvPicPr>
         <p:blipFill>
-          <a:blip r:embed="rId3"/>
+          <a:blip r:embed="rId4"/>
           <a:stretch>
             <a:fillRect/>
           </a:stretch>
@@ -3608,6 +3692,30 @@
           <a:xfrm>
             <a:off x="431800" y="1487096"/>
             <a:ext cx="10591800" cy="5714625"/>
+          </a:xfrm>
+          <a:prstGeom prst="rect">
+            <a:avLst/>
+          </a:prstGeom>
+        </p:spPr>
+      </p:pic>
+      <p:pic>
+        <p:nvPicPr>
+          <p:cNvPr id="6" name="그림 5"/>
+          <p:cNvPicPr>
+            <a:picLocks noChangeAspect="1"/>
+          </p:cNvPicPr>
+          <p:nvPr/>
+        </p:nvPicPr>
+        <p:blipFill>
+          <a:blip r:embed="rId5"/>
+          <a:stretch>
+            <a:fillRect/>
+          </a:stretch>
+        </p:blipFill>
+        <p:spPr>
+          <a:xfrm>
+            <a:off x="14157251" y="8591570"/>
+            <a:ext cx="2098749" cy="515216"/>
           </a:xfrm>
           <a:prstGeom prst="rect">
             <a:avLst/>
@@ -3935,6 +4043,30 @@
           </a:fontRef>
         </p:style>
       </p:cxnSp>
+      <p:pic>
+        <p:nvPicPr>
+          <p:cNvPr id="53" name="그림 52"/>
+          <p:cNvPicPr>
+            <a:picLocks noChangeAspect="1"/>
+          </p:cNvPicPr>
+          <p:nvPr/>
+        </p:nvPicPr>
+        <p:blipFill>
+          <a:blip r:embed="rId3"/>
+          <a:stretch>
+            <a:fillRect/>
+          </a:stretch>
+        </p:blipFill>
+        <p:spPr>
+          <a:xfrm>
+            <a:off x="14684156" y="8524789"/>
+            <a:ext cx="1571844" cy="619211"/>
+          </a:xfrm>
+          <a:prstGeom prst="rect">
+            <a:avLst/>
+          </a:prstGeom>
+        </p:spPr>
+      </p:pic>
     </p:spTree>
     <p:extLst>
       <p:ext uri="{BB962C8B-B14F-4D97-AF65-F5344CB8AC3E}">
